--- a/Presentation ML.pptx
+++ b/Presentation ML.pptx
@@ -5,7 +5,7 @@
     <p:sldMasterId id="2147483648" r:id="rId1"/>
   </p:sldMasterIdLst>
   <p:notesMasterIdLst>
-    <p:notesMasterId r:id="rId26"/>
+    <p:notesMasterId r:id="rId25"/>
   </p:notesMasterIdLst>
   <p:sldIdLst>
     <p:sldId id="256" r:id="rId2"/>
@@ -30,8 +30,7 @@
     <p:sldId id="275" r:id="rId21"/>
     <p:sldId id="276" r:id="rId22"/>
     <p:sldId id="277" r:id="rId23"/>
-    <p:sldId id="278" r:id="rId24"/>
-    <p:sldId id="281" r:id="rId25"/>
+    <p:sldId id="281" r:id="rId24"/>
   </p:sldIdLst>
   <p:sldSz cx="12188825" cy="6858000"/>
   <p:notesSz cx="6858000" cy="9144000"/>
@@ -11831,809 +11830,6 @@
 </file>
 
 <file path=ppt/slides/slide23.xml><?xml version="1.0" encoding="utf-8"?>
-<p:sld xmlns:a="http://schemas.openxmlformats.org/drawingml/2006/main" xmlns:r="http://schemas.openxmlformats.org/officeDocument/2006/relationships" xmlns:p="http://schemas.openxmlformats.org/presentationml/2006/main">
-  <p:cSld>
-    <p:bg>
-      <p:bgPr>
-        <a:solidFill>
-          <a:srgbClr val="F0F8FF"/>
-        </a:solidFill>
-        <a:effectLst/>
-      </p:bgPr>
-    </p:bg>
-    <p:spTree>
-      <p:nvGrpSpPr>
-        <p:cNvPr id="1" name=""/>
-        <p:cNvGrpSpPr/>
-        <p:nvPr/>
-      </p:nvGrpSpPr>
-      <p:grpSpPr>
-        <a:xfrm>
-          <a:off x="0" y="0"/>
-          <a:ext cx="0" cy="0"/>
-          <a:chOff x="0" y="0"/>
-          <a:chExt cx="0" cy="0"/>
-        </a:xfrm>
-      </p:grpSpPr>
-      <p:sp>
-        <p:nvSpPr>
-          <p:cNvPr id="2" name="Rectangle 1"/>
-          <p:cNvSpPr/>
-          <p:nvPr/>
-        </p:nvSpPr>
-        <p:spPr>
-          <a:xfrm>
-            <a:off x="0" y="0"/>
-            <a:ext cx="12188952" cy="1097280"/>
-          </a:xfrm>
-          <a:prstGeom prst="rect">
-            <a:avLst/>
-          </a:prstGeom>
-          <a:solidFill>
-            <a:srgbClr val="0F2041"/>
-          </a:solidFill>
-          <a:ln>
-            <a:noFill/>
-          </a:ln>
-        </p:spPr>
-        <p:style>
-          <a:lnRef idx="1">
-            <a:schemeClr val="accent1"/>
-          </a:lnRef>
-          <a:fillRef idx="3">
-            <a:schemeClr val="accent1"/>
-          </a:fillRef>
-          <a:effectRef idx="2">
-            <a:schemeClr val="accent1"/>
-          </a:effectRef>
-          <a:fontRef idx="minor">
-            <a:schemeClr val="lt1"/>
-          </a:fontRef>
-        </p:style>
-        <p:txBody>
-          <a:bodyPr rtlCol="0" anchor="ctr"/>
-          <a:lstStyle/>
-          <a:p>
-            <a:pPr algn="ctr"/>
-            <a:endParaRPr/>
-          </a:p>
-        </p:txBody>
-      </p:sp>
-      <p:sp>
-        <p:nvSpPr>
-          <p:cNvPr id="3" name="TextBox 2"/>
-          <p:cNvSpPr txBox="1"/>
-          <p:nvPr/>
-        </p:nvSpPr>
-        <p:spPr>
-          <a:xfrm>
-            <a:off x="365760" y="137160"/>
-            <a:ext cx="11430000" cy="914400"/>
-          </a:xfrm>
-          <a:prstGeom prst="rect">
-            <a:avLst/>
-          </a:prstGeom>
-          <a:noFill/>
-        </p:spPr>
-        <p:txBody>
-          <a:bodyPr wrap="none">
-            <a:spAutoFit/>
-          </a:bodyPr>
-          <a:lstStyle/>
-          <a:p>
-            <a:pPr>
-              <a:defRPr sz="2800" b="1">
-                <a:solidFill>
-                  <a:srgbClr val="FFFFFF"/>
-                </a:solidFill>
-              </a:defRPr>
-            </a:pPr>
-            <a:r>
-              <a:t>Định Hướng Phát Triển</a:t>
-            </a:r>
-          </a:p>
-        </p:txBody>
-      </p:sp>
-      <p:sp>
-        <p:nvSpPr>
-          <p:cNvPr id="4" name="TextBox 3"/>
-          <p:cNvSpPr txBox="1"/>
-          <p:nvPr/>
-        </p:nvSpPr>
-        <p:spPr>
-          <a:xfrm>
-            <a:off x="457200" y="1371600"/>
-            <a:ext cx="10972800" cy="4832092"/>
-          </a:xfrm>
-          <a:prstGeom prst="rect">
-            <a:avLst/>
-          </a:prstGeom>
-          <a:noFill/>
-        </p:spPr>
-        <p:txBody>
-          <a:bodyPr wrap="square">
-            <a:spAutoFit/>
-          </a:bodyPr>
-          <a:lstStyle/>
-          <a:p>
-            <a:pPr>
-              <a:spcAft>
-                <a:spcPts val="800"/>
-              </a:spcAft>
-              <a:defRPr sz="1800">
-                <a:solidFill>
-                  <a:srgbClr val="14143C"/>
-                </a:solidFill>
-              </a:defRPr>
-            </a:pPr>
-            <a:r>
-              <a:rPr dirty="0"/>
-              <a:t>• BM25 </a:t>
-            </a:r>
-            <a:r>
-              <a:rPr dirty="0" err="1"/>
-              <a:t>thay</a:t>
-            </a:r>
-            <a:r>
-              <a:rPr dirty="0"/>
-              <a:t> TF-IDF</a:t>
-            </a:r>
-          </a:p>
-          <a:p>
-            <a:pPr>
-              <a:spcAft>
-                <a:spcPts val="400"/>
-              </a:spcAft>
-              <a:defRPr sz="1600">
-                <a:solidFill>
-                  <a:srgbClr val="282864"/>
-                </a:solidFill>
-              </a:defRPr>
-            </a:pPr>
-            <a:r>
-              <a:rPr dirty="0"/>
-              <a:t>     BM25 </a:t>
-            </a:r>
-            <a:r>
-              <a:rPr dirty="0" err="1"/>
-              <a:t>tốt</a:t>
-            </a:r>
-            <a:r>
-              <a:rPr dirty="0"/>
-              <a:t> </a:t>
-            </a:r>
-            <a:r>
-              <a:rPr dirty="0" err="1"/>
-              <a:t>hơn</a:t>
-            </a:r>
-            <a:r>
-              <a:rPr dirty="0"/>
-              <a:t> TF-IDF ở </a:t>
-            </a:r>
-            <a:r>
-              <a:rPr dirty="0" err="1"/>
-              <a:t>chỗ</a:t>
-            </a:r>
-            <a:r>
-              <a:rPr dirty="0"/>
-              <a:t>: </a:t>
-            </a:r>
-            <a:r>
-              <a:rPr dirty="0" err="1"/>
-              <a:t>giảm</a:t>
-            </a:r>
-            <a:r>
-              <a:rPr dirty="0"/>
-              <a:t> bias </a:t>
-            </a:r>
-            <a:r>
-              <a:rPr dirty="0" err="1"/>
-              <a:t>tài</a:t>
-            </a:r>
-            <a:r>
-              <a:rPr dirty="0"/>
-              <a:t> </a:t>
-            </a:r>
-            <a:r>
-              <a:rPr dirty="0" err="1"/>
-              <a:t>liệu</a:t>
-            </a:r>
-            <a:r>
-              <a:rPr dirty="0"/>
-              <a:t> </a:t>
-            </a:r>
-            <a:r>
-              <a:rPr dirty="0" err="1"/>
-              <a:t>dài</a:t>
-            </a:r>
-            <a:r>
-              <a:rPr dirty="0"/>
-              <a:t>, </a:t>
-            </a:r>
-            <a:r>
-              <a:rPr dirty="0" err="1"/>
-              <a:t>xử</a:t>
-            </a:r>
-            <a:r>
-              <a:rPr dirty="0"/>
-              <a:t> </a:t>
-            </a:r>
-            <a:r>
-              <a:rPr dirty="0" err="1"/>
-              <a:t>lý</a:t>
-            </a:r>
-            <a:r>
-              <a:rPr dirty="0"/>
-              <a:t> </a:t>
-            </a:r>
-            <a:r>
-              <a:rPr dirty="0" err="1"/>
-              <a:t>từ</a:t>
-            </a:r>
-            <a:r>
-              <a:rPr dirty="0"/>
-              <a:t> </a:t>
-            </a:r>
-            <a:r>
-              <a:rPr dirty="0" err="1"/>
-              <a:t>hiếm</a:t>
-            </a:r>
-            <a:r>
-              <a:rPr dirty="0"/>
-              <a:t> </a:t>
-            </a:r>
-            <a:r>
-              <a:rPr dirty="0" err="1"/>
-              <a:t>tốt</a:t>
-            </a:r>
-            <a:r>
-              <a:rPr dirty="0"/>
-              <a:t> </a:t>
-            </a:r>
-            <a:r>
-              <a:rPr dirty="0" err="1"/>
-              <a:t>hơn</a:t>
-            </a:r>
-            <a:endParaRPr dirty="0"/>
-          </a:p>
-          <a:p>
-            <a:pPr>
-              <a:spcAft>
-                <a:spcPts val="400"/>
-              </a:spcAft>
-              <a:defRPr sz="1600">
-                <a:solidFill>
-                  <a:srgbClr val="282864"/>
-                </a:solidFill>
-              </a:defRPr>
-            </a:pPr>
-            <a:r>
-              <a:rPr dirty="0"/>
-              <a:t>     </a:t>
-            </a:r>
-            <a:r>
-              <a:rPr dirty="0" err="1"/>
-              <a:t>Triển</a:t>
-            </a:r>
-            <a:r>
-              <a:rPr dirty="0"/>
-              <a:t> </a:t>
-            </a:r>
-            <a:r>
-              <a:rPr dirty="0" err="1"/>
-              <a:t>khai</a:t>
-            </a:r>
-            <a:r>
-              <a:rPr dirty="0"/>
-              <a:t>: rank_bm25 </a:t>
-            </a:r>
-            <a:r>
-              <a:rPr dirty="0" err="1"/>
-              <a:t>từ</a:t>
-            </a:r>
-            <a:r>
-              <a:rPr dirty="0"/>
-              <a:t> rank_bm25 Python package</a:t>
-            </a:r>
-          </a:p>
-          <a:p>
-            <a:pPr>
-              <a:spcAft>
-                <a:spcPts val="800"/>
-              </a:spcAft>
-              <a:defRPr sz="1800">
-                <a:solidFill>
-                  <a:srgbClr val="14143C"/>
-                </a:solidFill>
-              </a:defRPr>
-            </a:pPr>
-            <a:r>
-              <a:rPr dirty="0"/>
-              <a:t>• Cross-Encoder Re-ranking</a:t>
-            </a:r>
-          </a:p>
-          <a:p>
-            <a:pPr>
-              <a:spcAft>
-                <a:spcPts val="400"/>
-              </a:spcAft>
-              <a:defRPr sz="1600">
-                <a:solidFill>
-                  <a:srgbClr val="282864"/>
-                </a:solidFill>
-              </a:defRPr>
-            </a:pPr>
-            <a:r>
-              <a:rPr dirty="0"/>
-              <a:t>     </a:t>
-            </a:r>
-            <a:r>
-              <a:rPr dirty="0" err="1"/>
-              <a:t>Dùng</a:t>
-            </a:r>
-            <a:r>
-              <a:rPr dirty="0"/>
-              <a:t> cross-encoder </a:t>
-            </a:r>
-            <a:r>
-              <a:rPr dirty="0" err="1"/>
-              <a:t>để</a:t>
-            </a:r>
-            <a:r>
-              <a:rPr dirty="0"/>
-              <a:t> re-rank top-50 </a:t>
-            </a:r>
-            <a:r>
-              <a:rPr dirty="0" err="1"/>
-              <a:t>từ</a:t>
-            </a:r>
-            <a:r>
-              <a:rPr dirty="0"/>
-              <a:t> hybrid retrieval</a:t>
-            </a:r>
-          </a:p>
-          <a:p>
-            <a:pPr>
-              <a:spcAft>
-                <a:spcPts val="400"/>
-              </a:spcAft>
-              <a:defRPr sz="1600">
-                <a:solidFill>
-                  <a:srgbClr val="282864"/>
-                </a:solidFill>
-              </a:defRPr>
-            </a:pPr>
-            <a:r>
-              <a:rPr dirty="0"/>
-              <a:t>     Cross-encoder </a:t>
-            </a:r>
-            <a:r>
-              <a:rPr dirty="0" err="1"/>
-              <a:t>chính</a:t>
-            </a:r>
-            <a:r>
-              <a:rPr dirty="0"/>
-              <a:t> </a:t>
-            </a:r>
-            <a:r>
-              <a:rPr dirty="0" err="1"/>
-              <a:t>xác</a:t>
-            </a:r>
-            <a:r>
-              <a:rPr dirty="0"/>
-              <a:t> </a:t>
-            </a:r>
-            <a:r>
-              <a:rPr dirty="0" err="1"/>
-              <a:t>hơn</a:t>
-            </a:r>
-            <a:r>
-              <a:rPr dirty="0"/>
-              <a:t> bi-encoder (Sentence-BERT) </a:t>
-            </a:r>
-            <a:r>
-              <a:rPr dirty="0" err="1"/>
-              <a:t>nhưng</a:t>
-            </a:r>
-            <a:r>
-              <a:rPr dirty="0"/>
-              <a:t> </a:t>
-            </a:r>
-            <a:r>
-              <a:rPr dirty="0" err="1"/>
-              <a:t>chậm</a:t>
-            </a:r>
-            <a:r>
-              <a:rPr dirty="0"/>
-              <a:t> </a:t>
-            </a:r>
-            <a:r>
-              <a:rPr dirty="0" err="1"/>
-              <a:t>hơn</a:t>
-            </a:r>
-            <a:endParaRPr dirty="0"/>
-          </a:p>
-          <a:p>
-            <a:pPr>
-              <a:spcAft>
-                <a:spcPts val="400"/>
-              </a:spcAft>
-              <a:defRPr sz="1600">
-                <a:solidFill>
-                  <a:srgbClr val="282864"/>
-                </a:solidFill>
-              </a:defRPr>
-            </a:pPr>
-            <a:r>
-              <a:rPr dirty="0"/>
-              <a:t>    </a:t>
-            </a:r>
-            <a:r>
-              <a:rPr lang="vi-VN" dirty="0"/>
-              <a:t> </a:t>
-            </a:r>
-            <a:r>
-              <a:rPr dirty="0"/>
-              <a:t>VD: cross-encoder/ms-marco-MiniLM-L-6-v2</a:t>
-            </a:r>
-          </a:p>
-          <a:p>
-            <a:pPr>
-              <a:spcAft>
-                <a:spcPts val="800"/>
-              </a:spcAft>
-              <a:defRPr sz="1800">
-                <a:solidFill>
-                  <a:srgbClr val="14143C"/>
-                </a:solidFill>
-              </a:defRPr>
-            </a:pPr>
-            <a:r>
-              <a:rPr dirty="0"/>
-              <a:t>• Fine-tune Sentence-BERT</a:t>
-            </a:r>
-          </a:p>
-          <a:p>
-            <a:pPr>
-              <a:spcAft>
-                <a:spcPts val="400"/>
-              </a:spcAft>
-              <a:defRPr sz="1600">
-                <a:solidFill>
-                  <a:srgbClr val="282864"/>
-                </a:solidFill>
-              </a:defRPr>
-            </a:pPr>
-            <a:r>
-              <a:rPr dirty="0"/>
-              <a:t>     Fine-tune </a:t>
-            </a:r>
-            <a:r>
-              <a:rPr dirty="0" err="1"/>
-              <a:t>trên</a:t>
-            </a:r>
-            <a:r>
-              <a:rPr dirty="0"/>
-              <a:t> </a:t>
-            </a:r>
-            <a:r>
-              <a:rPr dirty="0" err="1"/>
-              <a:t>cặp</a:t>
-            </a:r>
-            <a:r>
-              <a:rPr dirty="0"/>
-              <a:t> query-tender relevance </a:t>
-            </a:r>
-            <a:r>
-              <a:rPr dirty="0" err="1"/>
-              <a:t>từ</a:t>
-            </a:r>
-            <a:r>
-              <a:rPr dirty="0"/>
-              <a:t> data </a:t>
-            </a:r>
-            <a:r>
-              <a:rPr dirty="0" err="1"/>
-              <a:t>dauthau</a:t>
-            </a:r>
-            <a:endParaRPr dirty="0"/>
-          </a:p>
-          <a:p>
-            <a:pPr>
-              <a:spcAft>
-                <a:spcPts val="400"/>
-              </a:spcAft>
-              <a:defRPr sz="1600">
-                <a:solidFill>
-                  <a:srgbClr val="282864"/>
-                </a:solidFill>
-              </a:defRPr>
-            </a:pPr>
-            <a:r>
-              <a:rPr dirty="0"/>
-              <a:t>     </a:t>
-            </a:r>
-            <a:r>
-              <a:rPr dirty="0" err="1"/>
-              <a:t>Dùng</a:t>
-            </a:r>
-            <a:r>
-              <a:rPr dirty="0"/>
-              <a:t> </a:t>
-            </a:r>
-            <a:r>
-              <a:rPr dirty="0" err="1"/>
-              <a:t>TripletLoss</a:t>
-            </a:r>
-            <a:r>
-              <a:rPr dirty="0"/>
-              <a:t> </a:t>
-            </a:r>
-            <a:r>
-              <a:rPr dirty="0" err="1"/>
-              <a:t>hoặc</a:t>
-            </a:r>
-            <a:r>
-              <a:rPr dirty="0"/>
-              <a:t> </a:t>
-            </a:r>
-            <a:r>
-              <a:rPr dirty="0" err="1"/>
-              <a:t>ContrastiveLoss</a:t>
-            </a:r>
-            <a:endParaRPr dirty="0"/>
-          </a:p>
-          <a:p>
-            <a:pPr>
-              <a:spcAft>
-                <a:spcPts val="400"/>
-              </a:spcAft>
-              <a:defRPr sz="1600">
-                <a:solidFill>
-                  <a:srgbClr val="282864"/>
-                </a:solidFill>
-              </a:defRPr>
-            </a:pPr>
-            <a:r>
-              <a:rPr dirty="0"/>
-              <a:t>     </a:t>
-            </a:r>
-            <a:r>
-              <a:rPr dirty="0" err="1"/>
-              <a:t>Cải</a:t>
-            </a:r>
-            <a:r>
-              <a:rPr dirty="0"/>
-              <a:t> </a:t>
-            </a:r>
-            <a:r>
-              <a:rPr dirty="0" err="1"/>
-              <a:t>thiện</a:t>
-            </a:r>
-            <a:r>
-              <a:rPr dirty="0"/>
-              <a:t> </a:t>
-            </a:r>
-            <a:r>
-              <a:rPr dirty="0" err="1"/>
-              <a:t>đáng</a:t>
-            </a:r>
-            <a:r>
-              <a:rPr dirty="0"/>
-              <a:t> </a:t>
-            </a:r>
-            <a:r>
-              <a:rPr dirty="0" err="1"/>
-              <a:t>kể</a:t>
-            </a:r>
-            <a:r>
-              <a:rPr dirty="0"/>
-              <a:t> semantic matching </a:t>
-            </a:r>
-            <a:r>
-              <a:rPr dirty="0" err="1"/>
-              <a:t>cho</a:t>
-            </a:r>
-            <a:r>
-              <a:rPr dirty="0"/>
-              <a:t> domain </a:t>
-            </a:r>
-            <a:r>
-              <a:rPr dirty="0" err="1"/>
-              <a:t>tiếng</a:t>
-            </a:r>
-            <a:r>
-              <a:rPr dirty="0"/>
-              <a:t> Việt</a:t>
-            </a:r>
-          </a:p>
-          <a:p>
-            <a:pPr>
-              <a:spcAft>
-                <a:spcPts val="800"/>
-              </a:spcAft>
-              <a:defRPr sz="1800">
-                <a:solidFill>
-                  <a:srgbClr val="14143C"/>
-                </a:solidFill>
-              </a:defRPr>
-            </a:pPr>
-            <a:r>
-              <a:rPr dirty="0"/>
-              <a:t>• Learn-to-Rank</a:t>
-            </a:r>
-          </a:p>
-          <a:p>
-            <a:pPr>
-              <a:spcAft>
-                <a:spcPts val="400"/>
-              </a:spcAft>
-              <a:defRPr sz="1600">
-                <a:solidFill>
-                  <a:srgbClr val="282864"/>
-                </a:solidFill>
-              </a:defRPr>
-            </a:pPr>
-            <a:r>
-              <a:rPr dirty="0"/>
-              <a:t>     Thay heuristic weights </a:t>
-            </a:r>
-            <a:r>
-              <a:rPr dirty="0" err="1"/>
-              <a:t>bằng</a:t>
-            </a:r>
-            <a:r>
-              <a:rPr dirty="0"/>
-              <a:t> model ML (</a:t>
-            </a:r>
-            <a:r>
-              <a:rPr dirty="0" err="1"/>
-              <a:t>LambdaMART</a:t>
-            </a:r>
-            <a:r>
-              <a:rPr dirty="0"/>
-              <a:t>, </a:t>
-            </a:r>
-            <a:r>
-              <a:rPr dirty="0" err="1"/>
-              <a:t>LightGBM</a:t>
-            </a:r>
-            <a:r>
-              <a:rPr dirty="0"/>
-              <a:t>)</a:t>
-            </a:r>
-          </a:p>
-          <a:p>
-            <a:pPr>
-              <a:spcAft>
-                <a:spcPts val="400"/>
-              </a:spcAft>
-              <a:defRPr sz="1600">
-                <a:solidFill>
-                  <a:srgbClr val="282864"/>
-                </a:solidFill>
-              </a:defRPr>
-            </a:pPr>
-            <a:r>
-              <a:rPr dirty="0"/>
-              <a:t>     </a:t>
-            </a:r>
-            <a:r>
-              <a:rPr dirty="0" err="1"/>
-              <a:t>Huấn</a:t>
-            </a:r>
-            <a:r>
-              <a:rPr dirty="0"/>
-              <a:t> </a:t>
-            </a:r>
-            <a:r>
-              <a:rPr dirty="0" err="1"/>
-              <a:t>luyện</a:t>
-            </a:r>
-            <a:r>
-              <a:rPr dirty="0"/>
-              <a:t> </a:t>
-            </a:r>
-            <a:r>
-              <a:rPr dirty="0" err="1"/>
-              <a:t>trên</a:t>
-            </a:r>
-            <a:r>
-              <a:rPr dirty="0"/>
-              <a:t> click data / implicit feedback</a:t>
-            </a:r>
-          </a:p>
-          <a:p>
-            <a:pPr>
-              <a:spcAft>
-                <a:spcPts val="400"/>
-              </a:spcAft>
-              <a:defRPr sz="1600">
-                <a:solidFill>
-                  <a:srgbClr val="282864"/>
-                </a:solidFill>
-              </a:defRPr>
-            </a:pPr>
-            <a:r>
-              <a:rPr dirty="0"/>
-              <a:t>     </a:t>
-            </a:r>
-            <a:r>
-              <a:rPr dirty="0" err="1"/>
-              <a:t>Tối</a:t>
-            </a:r>
-            <a:r>
-              <a:rPr dirty="0"/>
-              <a:t> </a:t>
-            </a:r>
-            <a:r>
-              <a:rPr dirty="0" err="1"/>
-              <a:t>ưu</a:t>
-            </a:r>
-            <a:r>
-              <a:rPr dirty="0"/>
-              <a:t> </a:t>
-            </a:r>
-            <a:r>
-              <a:rPr dirty="0" err="1"/>
-              <a:t>trọng</a:t>
-            </a:r>
-            <a:r>
-              <a:rPr dirty="0"/>
-              <a:t> </a:t>
-            </a:r>
-            <a:r>
-              <a:rPr dirty="0" err="1"/>
-              <a:t>số</a:t>
-            </a:r>
-            <a:r>
-              <a:rPr dirty="0"/>
-              <a:t> </a:t>
-            </a:r>
-            <a:r>
-              <a:rPr dirty="0" err="1"/>
-              <a:t>tự</a:t>
-            </a:r>
-            <a:r>
-              <a:rPr dirty="0"/>
-              <a:t> </a:t>
-            </a:r>
-            <a:r>
-              <a:rPr dirty="0" err="1"/>
-              <a:t>động</a:t>
-            </a:r>
-            <a:r>
-              <a:rPr dirty="0"/>
-              <a:t> </a:t>
-            </a:r>
-            <a:r>
-              <a:rPr dirty="0" err="1"/>
-              <a:t>thay</a:t>
-            </a:r>
-            <a:r>
-              <a:rPr dirty="0"/>
-              <a:t> </a:t>
-            </a:r>
-            <a:r>
-              <a:rPr dirty="0" err="1"/>
-              <a:t>vì</a:t>
-            </a:r>
-            <a:r>
-              <a:rPr dirty="0"/>
-              <a:t> hard-code</a:t>
-            </a:r>
-          </a:p>
-        </p:txBody>
-      </p:sp>
-    </p:spTree>
-  </p:cSld>
-  <p:clrMapOvr>
-    <a:masterClrMapping/>
-  </p:clrMapOvr>
-</p:sld>
-</file>
-
-<file path=ppt/slides/slide24.xml><?xml version="1.0" encoding="utf-8"?>
 <p:sld xmlns:a="http://schemas.openxmlformats.org/drawingml/2006/main" xmlns:r="http://schemas.openxmlformats.org/officeDocument/2006/relationships" xmlns:p="http://schemas.openxmlformats.org/presentationml/2006/main">
   <p:cSld>
     <p:spTree>

--- a/Presentation ML.pptx
+++ b/Presentation ML.pptx
@@ -572,6 +572,90 @@
     <p:extLst>
       <p:ext uri="{BB962C8B-B14F-4D97-AF65-F5344CB8AC3E}">
         <p14:creationId xmlns:p14="http://schemas.microsoft.com/office/powerpoint/2010/main" val="2871914240"/>
+      </p:ext>
+    </p:extLst>
+  </p:cSld>
+  <p:clrMapOvr>
+    <a:masterClrMapping/>
+  </p:clrMapOvr>
+</p:notes>
+</file>
+
+<file path=ppt/notesSlides/notesSlide2.xml><?xml version="1.0" encoding="utf-8"?>
+<p:notes xmlns:a="http://schemas.openxmlformats.org/drawingml/2006/main" xmlns:r="http://schemas.openxmlformats.org/officeDocument/2006/relationships" xmlns:p="http://schemas.openxmlformats.org/presentationml/2006/main">
+  <p:cSld>
+    <p:spTree>
+      <p:nvGrpSpPr>
+        <p:cNvPr id="1" name=""/>
+        <p:cNvGrpSpPr/>
+        <p:nvPr/>
+      </p:nvGrpSpPr>
+      <p:grpSpPr>
+        <a:xfrm>
+          <a:off x="0" y="0"/>
+          <a:ext cx="0" cy="0"/>
+          <a:chOff x="0" y="0"/>
+          <a:chExt cx="0" cy="0"/>
+        </a:xfrm>
+      </p:grpSpPr>
+      <p:sp>
+        <p:nvSpPr>
+          <p:cNvPr id="2" name="Slide Image Placeholder 1"/>
+          <p:cNvSpPr>
+            <a:spLocks noGrp="1" noRot="1" noChangeAspect="1"/>
+          </p:cNvSpPr>
+          <p:nvPr>
+            <p:ph type="sldImg"/>
+          </p:nvPr>
+        </p:nvSpPr>
+        <p:spPr/>
+      </p:sp>
+      <p:sp>
+        <p:nvSpPr>
+          <p:cNvPr id="3" name="Notes Placeholder 2"/>
+          <p:cNvSpPr>
+            <a:spLocks noGrp="1"/>
+          </p:cNvSpPr>
+          <p:nvPr>
+            <p:ph type="body" idx="1"/>
+          </p:nvPr>
+        </p:nvSpPr>
+        <p:spPr/>
+        <p:txBody>
+          <a:bodyPr/>
+          <a:lstStyle/>
+          <a:p>
+            <a:endParaRPr lang="en-US" dirty="0"/>
+          </a:p>
+        </p:txBody>
+      </p:sp>
+      <p:sp>
+        <p:nvSpPr>
+          <p:cNvPr id="4" name="Slide Number Placeholder 3"/>
+          <p:cNvSpPr>
+            <a:spLocks noGrp="1"/>
+          </p:cNvSpPr>
+          <p:nvPr>
+            <p:ph type="sldNum" sz="quarter" idx="5"/>
+          </p:nvPr>
+        </p:nvSpPr>
+        <p:spPr/>
+        <p:txBody>
+          <a:bodyPr/>
+          <a:lstStyle/>
+          <a:p>
+            <a:fld id="{30D046F5-D873-4794-A230-D869964AC945}" type="slidenum">
+              <a:rPr lang="en-US" smtClean="0"/>
+              <a:t>20</a:t>
+            </a:fld>
+            <a:endParaRPr lang="en-US"/>
+          </a:p>
+        </p:txBody>
+      </p:sp>
+    </p:spTree>
+    <p:extLst>
+      <p:ext uri="{BB962C8B-B14F-4D97-AF65-F5344CB8AC3E}">
+        <p14:creationId xmlns:p14="http://schemas.microsoft.com/office/powerpoint/2010/main" val="2484977238"/>
       </p:ext>
     </p:extLst>
   </p:cSld>
@@ -10450,7 +10534,7 @@
         </p:nvSpPr>
         <p:spPr>
           <a:xfrm>
-            <a:off x="365760" y="1280160"/>
+            <a:off x="669766" y="2071254"/>
             <a:ext cx="5486400" cy="457200"/>
           </a:xfrm>
           <a:prstGeom prst="rect">
@@ -10472,7 +10556,44 @@
               </a:defRPr>
             </a:pPr>
             <a:r>
-              <a:t>Gói thầu A (khớp hoàn hảo)</a:t>
+              <a:rPr dirty="0" err="1"/>
+              <a:t>Gói</a:t>
+            </a:r>
+            <a:r>
+              <a:rPr dirty="0"/>
+              <a:t> </a:t>
+            </a:r>
+            <a:r>
+              <a:rPr dirty="0" err="1"/>
+              <a:t>thầu</a:t>
+            </a:r>
+            <a:r>
+              <a:rPr dirty="0"/>
+              <a:t> A (</a:t>
+            </a:r>
+            <a:r>
+              <a:rPr dirty="0" err="1"/>
+              <a:t>khớp</a:t>
+            </a:r>
+            <a:r>
+              <a:rPr dirty="0"/>
+              <a:t> </a:t>
+            </a:r>
+            <a:r>
+              <a:rPr dirty="0" err="1"/>
+              <a:t>hoàn</a:t>
+            </a:r>
+            <a:r>
+              <a:rPr dirty="0"/>
+              <a:t> </a:t>
+            </a:r>
+            <a:r>
+              <a:rPr dirty="0" err="1"/>
+              <a:t>hảo</a:t>
+            </a:r>
+            <a:r>
+              <a:rPr dirty="0"/>
+              <a:t>)</a:t>
             </a:r>
           </a:p>
         </p:txBody>
@@ -10485,7 +10606,7 @@
         </p:nvSpPr>
         <p:spPr>
           <a:xfrm>
-            <a:off x="365760" y="1737360"/>
+            <a:off x="608012" y="2673927"/>
             <a:ext cx="5486400" cy="3893374"/>
           </a:xfrm>
           <a:prstGeom prst="rect">
@@ -10885,8 +11006,8 @@
         </p:nvSpPr>
         <p:spPr>
           <a:xfrm>
-            <a:off x="6217920" y="1280160"/>
-            <a:ext cx="5486400" cy="457200"/>
+            <a:off x="7010400" y="1584267"/>
+            <a:ext cx="4394042" cy="830997"/>
           </a:xfrm>
           <a:prstGeom prst="rect">
             <a:avLst/>
@@ -10894,7 +11015,7 @@
           <a:noFill/>
         </p:spPr>
         <p:txBody>
-          <a:bodyPr wrap="none">
+          <a:bodyPr wrap="square">
             <a:spAutoFit/>
           </a:bodyPr>
           <a:lstStyle/>
@@ -10907,8 +11028,18 @@
               </a:defRPr>
             </a:pPr>
             <a:r>
-              <a:t>Gói thầu B (khớp trung bình)</a:t>
-            </a:r>
+              <a:rPr sz="1600" dirty="0" err="1"/>
+              <a:t>Gói</a:t>
+            </a:r>
+            <a:r>
+              <a:rPr sz="1600" dirty="0"/>
+              <a:t> </a:t>
+            </a:r>
+            <a:r>
+              <a:rPr lang="vi-VN" sz="1600" dirty="0"/>
+              <a:t>thầu:Chi phí mua sắm trang thiết bị (Đã bao gồm chi phí triển khai cài đặt, cấu hình, hướng dẫn sử dụng) </a:t>
+            </a:r>
+            <a:endParaRPr sz="1600" dirty="0"/>
           </a:p>
         </p:txBody>
       </p:sp>
@@ -10920,7 +11051,7 @@
         </p:nvSpPr>
         <p:spPr>
           <a:xfrm>
-            <a:off x="6217920" y="1737360"/>
+            <a:off x="7010400" y="2528454"/>
             <a:ext cx="5486400" cy="3893374"/>
           </a:xfrm>
           <a:prstGeom prst="rect">
@@ -10946,48 +11077,17 @@
             </a:pPr>
             <a:r>
               <a:rPr dirty="0"/>
-              <a:t>• Query: '</a:t>
-            </a:r>
-            <a:r>
-              <a:rPr dirty="0" err="1"/>
-              <a:t>Xây</a:t>
-            </a:r>
-            <a:r>
-              <a:rPr dirty="0"/>
-              <a:t> </a:t>
-            </a:r>
-            <a:r>
-              <a:rPr dirty="0" err="1"/>
-              <a:t>dựng</a:t>
-            </a:r>
-            <a:r>
-              <a:rPr dirty="0"/>
-              <a:t> </a:t>
-            </a:r>
-            <a:r>
-              <a:rPr dirty="0" err="1"/>
-              <a:t>cầu</a:t>
-            </a:r>
-            <a:r>
-              <a:rPr dirty="0"/>
-              <a:t> </a:t>
-            </a:r>
-            <a:r>
-              <a:rPr dirty="0" err="1"/>
-              <a:t>giao</a:t>
-            </a:r>
-            <a:r>
-              <a:rPr dirty="0"/>
-              <a:t> </a:t>
-            </a:r>
-            <a:r>
-              <a:rPr dirty="0" err="1"/>
-              <a:t>thông</a:t>
-            </a:r>
-            <a:r>
-              <a:rPr dirty="0"/>
-              <a:t>'</a:t>
-            </a:r>
+              <a:t>• Query: </a:t>
+            </a:r>
+            <a:r>
+              <a:rPr lang="vi-VN" dirty="0"/>
+              <a:t>"</a:t>
+            </a:r>
+            <a:r>
+              <a:rPr lang="vi-VN" sz="1600" dirty="0"/>
+              <a:t>Chi phí mua sắm trang thiết bị”</a:t>
+            </a:r>
+            <a:endParaRPr dirty="0"/>
           </a:p>
           <a:p>
             <a:pPr>
@@ -11018,21 +11118,20 @@
             </a:r>
             <a:r>
               <a:rPr dirty="0"/>
-              <a:t>: '</a:t>
-            </a:r>
-            <a:r>
-              <a:rPr dirty="0" err="1"/>
-              <a:t>Không</a:t>
-            </a:r>
-            <a:r>
-              <a:rPr dirty="0"/>
-              <a:t> </a:t>
-            </a:r>
-            <a:r>
-              <a:rPr dirty="0" err="1"/>
-              <a:t>khớp</a:t>
-            </a:r>
-            <a:endParaRPr dirty="0"/>
+              <a:t>: </a:t>
+            </a:r>
+            <a:r>
+              <a:rPr lang="en-US" dirty="0" err="1"/>
+              <a:t>Hàng</a:t>
+            </a:r>
+            <a:r>
+              <a:rPr lang="en-US" dirty="0"/>
+              <a:t> </a:t>
+            </a:r>
+            <a:r>
+              <a:rPr lang="vi-VN" dirty="0"/>
+              <a:t>hóa (khớp)</a:t>
+            </a:r>
           </a:p>
           <a:p>
             <a:pPr>
@@ -11063,15 +11162,27 @@
             </a:r>
             <a:r>
               <a:rPr dirty="0"/>
-              <a:t>: '</a:t>
-            </a:r>
-            <a:r>
-              <a:rPr dirty="0" err="1"/>
-              <a:t>Cà</a:t>
-            </a:r>
-            <a:r>
-              <a:rPr dirty="0"/>
-              <a:t> Mau' (</a:t>
+              <a:t>: </a:t>
+            </a:r>
+            <a:r>
+              <a:rPr lang="en-US" dirty="0" err="1"/>
+              <a:t>Tỉnh</a:t>
+            </a:r>
+            <a:r>
+              <a:rPr lang="en-US" dirty="0"/>
+              <a:t> </a:t>
+            </a:r>
+            <a:r>
+              <a:rPr lang="en-US" dirty="0" err="1"/>
+              <a:t>Đồng</a:t>
+            </a:r>
+            <a:r>
+              <a:rPr lang="en-US" dirty="0"/>
+              <a:t> Nai</a:t>
+            </a:r>
+            <a:r>
+              <a:rPr dirty="0"/>
+              <a:t>' (</a:t>
             </a:r>
             <a:r>
               <a:rPr dirty="0" err="1"/>
@@ -11111,7 +11222,15 @@
             </a:r>
             <a:r>
               <a:rPr dirty="0"/>
-              <a:t>: 800 </a:t>
+              <a:t>: </a:t>
+            </a:r>
+            <a:r>
+              <a:rPr lang="vi-VN" dirty="0"/>
+              <a:t>21</a:t>
+            </a:r>
+            <a:r>
+              <a:rPr dirty="0"/>
+              <a:t> </a:t>
             </a:r>
             <a:r>
               <a:rPr dirty="0" err="1"/>
@@ -11122,8 +11241,8 @@
               <a:t> (</a:t>
             </a:r>
             <a:r>
-              <a:rPr dirty="0" err="1"/>
-              <a:t>ngoài</a:t>
+              <a:rPr lang="vi-VN" dirty="0"/>
+              <a:t>trong</a:t>
             </a:r>
             <a:r>
               <a:rPr dirty="0"/>
@@ -11151,7 +11270,15 @@
             </a:pPr>
             <a:r>
               <a:rPr dirty="0"/>
-              <a:t>• Deadline: 60 </a:t>
+              <a:t>• Deadline: </a:t>
+            </a:r>
+            <a:r>
+              <a:rPr lang="vi-VN" dirty="0"/>
+              <a:t>7</a:t>
+            </a:r>
+            <a:r>
+              <a:rPr dirty="0"/>
+              <a:t> </a:t>
             </a:r>
             <a:r>
               <a:rPr dirty="0" err="1"/>
@@ -11200,8 +11327,13 @@
             </a:pPr>
             <a:r>
               <a:rPr dirty="0"/>
-              <a:t>• lexical:  0.35 x 42 = 14.70</a:t>
-            </a:r>
+              <a:t>• lexical:  </a:t>
+            </a:r>
+            <a:r>
+              <a:rPr lang="en-US" dirty="0"/>
+              <a:t>12,29</a:t>
+            </a:r>
+            <a:endParaRPr dirty="0"/>
           </a:p>
           <a:p>
             <a:pPr>
@@ -11216,8 +11348,13 @@
             </a:pPr>
             <a:r>
               <a:rPr dirty="0"/>
-              <a:t>• semantic: 0.35 x 55 = 19.25</a:t>
-            </a:r>
+              <a:t>• semantic: </a:t>
+            </a:r>
+            <a:r>
+              <a:rPr lang="en-US" dirty="0"/>
+              <a:t>73,27</a:t>
+            </a:r>
+            <a:endParaRPr dirty="0"/>
           </a:p>
           <a:p>
             <a:pPr>
@@ -11232,8 +11369,13 @@
             </a:pPr>
             <a:r>
               <a:rPr dirty="0"/>
-              <a:t>• historical: 0.15 x 0  =  0.00</a:t>
-            </a:r>
+              <a:t>• historical: </a:t>
+            </a:r>
+            <a:r>
+              <a:rPr lang="en-US" dirty="0"/>
+              <a:t>100</a:t>
+            </a:r>
+            <a:endParaRPr dirty="0"/>
           </a:p>
           <a:p>
             <a:pPr>
@@ -11248,8 +11390,13 @@
             </a:pPr>
             <a:r>
               <a:rPr dirty="0"/>
-              <a:t>• price:    0.10 x 15  =  1.50</a:t>
-            </a:r>
+              <a:t>• price: </a:t>
+            </a:r>
+            <a:r>
+              <a:rPr lang="en-US" dirty="0"/>
+              <a:t>78,92</a:t>
+            </a:r>
+            <a:endParaRPr dirty="0"/>
           </a:p>
           <a:p>
             <a:pPr>
@@ -11264,7 +11411,7 @@
             </a:pPr>
             <a:r>
               <a:rPr dirty="0"/>
-              <a:t>• recency:  0.05 x 60  =  3.00</a:t>
+              <a:t>• recency:  3.00</a:t>
             </a:r>
           </a:p>
           <a:p>
@@ -11280,11 +11427,46 @@
             </a:pPr>
             <a:r>
               <a:rPr dirty="0"/>
-              <a:t>• TOTAL:              = 38.45</a:t>
-            </a:r>
+              <a:t>• TOTAL:  = </a:t>
+            </a:r>
+            <a:r>
+              <a:rPr lang="vi-VN" dirty="0"/>
+              <a:t>54.3</a:t>
+            </a:r>
+            <a:endParaRPr dirty="0"/>
           </a:p>
         </p:txBody>
       </p:sp>
+      <p:pic>
+        <p:nvPicPr>
+          <p:cNvPr id="13" name="Picture 12">
+            <a:extLst>
+              <a:ext uri="{FF2B5EF4-FFF2-40B4-BE49-F238E27FC236}">
+                <a16:creationId xmlns:a16="http://schemas.microsoft.com/office/drawing/2014/main" id="{2370F7D4-F2D8-7546-A83B-C17FA341E8EC}"/>
+              </a:ext>
+            </a:extLst>
+          </p:cNvPr>
+          <p:cNvPicPr>
+            <a:picLocks noChangeAspect="1"/>
+          </p:cNvPicPr>
+          <p:nvPr/>
+        </p:nvPicPr>
+        <p:blipFill>
+          <a:blip r:embed="rId3"/>
+          <a:stretch>
+            <a:fillRect/>
+          </a:stretch>
+        </p:blipFill>
+        <p:spPr>
+          <a:xfrm>
+            <a:off x="229255" y="1095148"/>
+            <a:ext cx="6243914" cy="5472153"/>
+          </a:xfrm>
+          <a:prstGeom prst="rect">
+            <a:avLst/>
+          </a:prstGeom>
+        </p:spPr>
+      </p:pic>
     </p:spTree>
   </p:cSld>
   <p:clrMapOvr>
